--- a/presentation_temp.pptx
+++ b/presentation_temp.pptx
@@ -2,10 +2,10 @@
 <file path=ppt/presentation.xml><?xml version="1.0" encoding="utf-8"?>
 <p:presentation xmlns:a="http://schemas.openxmlformats.org/drawingml/2006/main" xmlns:r="http://schemas.openxmlformats.org/officeDocument/2006/relationships" xmlns:p="http://schemas.openxmlformats.org/presentationml/2006/main" saveSubsetFonts="1">
   <p:sldMasterIdLst>
-    <p:sldMasterId id="2147483648" r:id="rId1"/>
+    <p:sldMasterId id="2147483660" r:id="rId1"/>
   </p:sldMasterIdLst>
   <p:sldIdLst>
-    <p:sldId id="256" r:id="rId2"/>
+    <p:sldId id="268" r:id="rId2"/>
     <p:sldId id="264" r:id="rId3"/>
     <p:sldId id="257" r:id="rId4"/>
     <p:sldId id="258" r:id="rId5"/>
@@ -117,8 +117,16 @@
 </file>
 
 <file path=ppt/slideLayouts/slideLayout1.xml><?xml version="1.0" encoding="utf-8"?>
-<p:sldLayout xmlns:a="http://schemas.openxmlformats.org/drawingml/2006/main" xmlns:r="http://schemas.openxmlformats.org/officeDocument/2006/relationships" xmlns:p="http://schemas.openxmlformats.org/presentationml/2006/main" type="title" preserve="1">
+<p:sldLayout xmlns:a="http://schemas.openxmlformats.org/drawingml/2006/main" xmlns:r="http://schemas.openxmlformats.org/officeDocument/2006/relationships" xmlns:p="http://schemas.openxmlformats.org/presentationml/2006/main" type="title">
   <p:cSld name="Title Slide">
+    <p:bg>
+      <p:bgPr>
+        <a:solidFill>
+          <a:srgbClr val="F4F9FD"/>
+        </a:solidFill>
+        <a:effectLst/>
+      </p:bgPr>
+    </p:bg>
     <p:spTree>
       <p:nvGrpSpPr>
         <p:cNvPr id="1" name=""/>
@@ -337,8 +345,16 @@
 </file>
 
 <file path=ppt/slideLayouts/slideLayout10.xml><?xml version="1.0" encoding="utf-8"?>
-<p:sldLayout xmlns:a="http://schemas.openxmlformats.org/drawingml/2006/main" xmlns:r="http://schemas.openxmlformats.org/officeDocument/2006/relationships" xmlns:p="http://schemas.openxmlformats.org/presentationml/2006/main" type="vertTx" preserve="1">
+<p:sldLayout xmlns:a="http://schemas.openxmlformats.org/drawingml/2006/main" xmlns:r="http://schemas.openxmlformats.org/officeDocument/2006/relationships" xmlns:p="http://schemas.openxmlformats.org/presentationml/2006/main" type="vertTx">
   <p:cSld name="Title and Vertical Text">
+    <p:bg>
+      <p:bgPr>
+        <a:solidFill>
+          <a:srgbClr val="F4F9FD"/>
+        </a:solidFill>
+        <a:effectLst/>
+      </p:bgPr>
+    </p:bg>
     <p:spTree>
       <p:nvGrpSpPr>
         <p:cNvPr id="1" name=""/>
@@ -535,8 +551,16 @@
 </file>
 
 <file path=ppt/slideLayouts/slideLayout11.xml><?xml version="1.0" encoding="utf-8"?>
-<p:sldLayout xmlns:a="http://schemas.openxmlformats.org/drawingml/2006/main" xmlns:r="http://schemas.openxmlformats.org/officeDocument/2006/relationships" xmlns:p="http://schemas.openxmlformats.org/presentationml/2006/main" type="vertTitleAndTx" preserve="1">
+<p:sldLayout xmlns:a="http://schemas.openxmlformats.org/drawingml/2006/main" xmlns:r="http://schemas.openxmlformats.org/officeDocument/2006/relationships" xmlns:p="http://schemas.openxmlformats.org/presentationml/2006/main" type="vertTitleAndTx">
   <p:cSld name="Vertical Title and Text">
+    <p:bg>
+      <p:bgPr>
+        <a:solidFill>
+          <a:srgbClr val="F4F9FD"/>
+        </a:solidFill>
+        <a:effectLst/>
+      </p:bgPr>
+    </p:bg>
     <p:spTree>
       <p:nvGrpSpPr>
         <p:cNvPr id="1" name=""/>
@@ -743,8 +767,16 @@
 </file>
 
 <file path=ppt/slideLayouts/slideLayout2.xml><?xml version="1.0" encoding="utf-8"?>
-<p:sldLayout xmlns:a="http://schemas.openxmlformats.org/drawingml/2006/main" xmlns:r="http://schemas.openxmlformats.org/officeDocument/2006/relationships" xmlns:p="http://schemas.openxmlformats.org/presentationml/2006/main" type="obj" preserve="1">
+<p:sldLayout xmlns:a="http://schemas.openxmlformats.org/drawingml/2006/main" xmlns:r="http://schemas.openxmlformats.org/officeDocument/2006/relationships" xmlns:p="http://schemas.openxmlformats.org/presentationml/2006/main" type="obj">
   <p:cSld name="Title and Content">
+    <p:bg>
+      <p:bgPr>
+        <a:solidFill>
+          <a:srgbClr val="F4F9FD"/>
+        </a:solidFill>
+        <a:effectLst/>
+      </p:bgPr>
+    </p:bg>
     <p:spTree>
       <p:nvGrpSpPr>
         <p:cNvPr id="1" name=""/>
@@ -941,8 +973,16 @@
 </file>
 
 <file path=ppt/slideLayouts/slideLayout3.xml><?xml version="1.0" encoding="utf-8"?>
-<p:sldLayout xmlns:a="http://schemas.openxmlformats.org/drawingml/2006/main" xmlns:r="http://schemas.openxmlformats.org/officeDocument/2006/relationships" xmlns:p="http://schemas.openxmlformats.org/presentationml/2006/main" type="secHead" preserve="1">
+<p:sldLayout xmlns:a="http://schemas.openxmlformats.org/drawingml/2006/main" xmlns:r="http://schemas.openxmlformats.org/officeDocument/2006/relationships" xmlns:p="http://schemas.openxmlformats.org/presentationml/2006/main" type="secHead">
   <p:cSld name="Section Header">
+    <p:bg>
+      <p:bgPr>
+        <a:solidFill>
+          <a:srgbClr val="F4F9FD"/>
+        </a:solidFill>
+        <a:effectLst/>
+      </p:bgPr>
+    </p:bg>
     <p:spTree>
       <p:nvGrpSpPr>
         <p:cNvPr id="1" name=""/>
@@ -1216,8 +1256,16 @@
 </file>
 
 <file path=ppt/slideLayouts/slideLayout4.xml><?xml version="1.0" encoding="utf-8"?>
-<p:sldLayout xmlns:a="http://schemas.openxmlformats.org/drawingml/2006/main" xmlns:r="http://schemas.openxmlformats.org/officeDocument/2006/relationships" xmlns:p="http://schemas.openxmlformats.org/presentationml/2006/main" type="twoObj" preserve="1">
+<p:sldLayout xmlns:a="http://schemas.openxmlformats.org/drawingml/2006/main" xmlns:r="http://schemas.openxmlformats.org/officeDocument/2006/relationships" xmlns:p="http://schemas.openxmlformats.org/presentationml/2006/main" type="twoObj">
   <p:cSld name="Two Content">
+    <p:bg>
+      <p:bgPr>
+        <a:solidFill>
+          <a:srgbClr val="F4F9FD"/>
+        </a:solidFill>
+        <a:effectLst/>
+      </p:bgPr>
+    </p:bg>
     <p:spTree>
       <p:nvGrpSpPr>
         <p:cNvPr id="1" name=""/>
@@ -1481,8 +1529,16 @@
 </file>
 
 <file path=ppt/slideLayouts/slideLayout5.xml><?xml version="1.0" encoding="utf-8"?>
-<p:sldLayout xmlns:a="http://schemas.openxmlformats.org/drawingml/2006/main" xmlns:r="http://schemas.openxmlformats.org/officeDocument/2006/relationships" xmlns:p="http://schemas.openxmlformats.org/presentationml/2006/main" type="twoTxTwoObj" preserve="1">
+<p:sldLayout xmlns:a="http://schemas.openxmlformats.org/drawingml/2006/main" xmlns:r="http://schemas.openxmlformats.org/officeDocument/2006/relationships" xmlns:p="http://schemas.openxmlformats.org/presentationml/2006/main" type="twoTxTwoObj">
   <p:cSld name="Comparison">
+    <p:bg>
+      <p:bgPr>
+        <a:solidFill>
+          <a:srgbClr val="F4F9FD"/>
+        </a:solidFill>
+        <a:effectLst/>
+      </p:bgPr>
+    </p:bg>
     <p:spTree>
       <p:nvGrpSpPr>
         <p:cNvPr id="1" name=""/>
@@ -1893,8 +1949,16 @@
 </file>
 
 <file path=ppt/slideLayouts/slideLayout6.xml><?xml version="1.0" encoding="utf-8"?>
-<p:sldLayout xmlns:a="http://schemas.openxmlformats.org/drawingml/2006/main" xmlns:r="http://schemas.openxmlformats.org/officeDocument/2006/relationships" xmlns:p="http://schemas.openxmlformats.org/presentationml/2006/main" type="titleOnly" preserve="1">
+<p:sldLayout xmlns:a="http://schemas.openxmlformats.org/drawingml/2006/main" xmlns:r="http://schemas.openxmlformats.org/officeDocument/2006/relationships" xmlns:p="http://schemas.openxmlformats.org/presentationml/2006/main" type="titleOnly">
   <p:cSld name="Title Only">
+    <p:bg>
+      <p:bgPr>
+        <a:solidFill>
+          <a:srgbClr val="F4F9FD"/>
+        </a:solidFill>
+        <a:effectLst/>
+      </p:bgPr>
+    </p:bg>
     <p:spTree>
       <p:nvGrpSpPr>
         <p:cNvPr id="1" name=""/>
@@ -2034,8 +2098,16 @@
 </file>
 
 <file path=ppt/slideLayouts/slideLayout7.xml><?xml version="1.0" encoding="utf-8"?>
-<p:sldLayout xmlns:a="http://schemas.openxmlformats.org/drawingml/2006/main" xmlns:r="http://schemas.openxmlformats.org/officeDocument/2006/relationships" xmlns:p="http://schemas.openxmlformats.org/presentationml/2006/main" type="blank" preserve="1">
+<p:sldLayout xmlns:a="http://schemas.openxmlformats.org/drawingml/2006/main" xmlns:r="http://schemas.openxmlformats.org/officeDocument/2006/relationships" xmlns:p="http://schemas.openxmlformats.org/presentationml/2006/main" type="blank">
   <p:cSld name="Blank">
+    <p:bg>
+      <p:bgPr>
+        <a:solidFill>
+          <a:srgbClr val="F4F9FD"/>
+        </a:solidFill>
+        <a:effectLst/>
+      </p:bgPr>
+    </p:bg>
     <p:spTree>
       <p:nvGrpSpPr>
         <p:cNvPr id="1" name=""/>
@@ -2147,8 +2219,16 @@
 </file>
 
 <file path=ppt/slideLayouts/slideLayout8.xml><?xml version="1.0" encoding="utf-8"?>
-<p:sldLayout xmlns:a="http://schemas.openxmlformats.org/drawingml/2006/main" xmlns:r="http://schemas.openxmlformats.org/officeDocument/2006/relationships" xmlns:p="http://schemas.openxmlformats.org/presentationml/2006/main" type="objTx" preserve="1">
+<p:sldLayout xmlns:a="http://schemas.openxmlformats.org/drawingml/2006/main" xmlns:r="http://schemas.openxmlformats.org/officeDocument/2006/relationships" xmlns:p="http://schemas.openxmlformats.org/presentationml/2006/main" type="objTx">
   <p:cSld name="Content with Caption">
+    <p:bg>
+      <p:bgPr>
+        <a:solidFill>
+          <a:srgbClr val="F4F9FD"/>
+        </a:solidFill>
+        <a:effectLst/>
+      </p:bgPr>
+    </p:bg>
     <p:spTree>
       <p:nvGrpSpPr>
         <p:cNvPr id="1" name=""/>
@@ -2458,8 +2538,16 @@
 </file>
 
 <file path=ppt/slideLayouts/slideLayout9.xml><?xml version="1.0" encoding="utf-8"?>
-<p:sldLayout xmlns:a="http://schemas.openxmlformats.org/drawingml/2006/main" xmlns:r="http://schemas.openxmlformats.org/officeDocument/2006/relationships" xmlns:p="http://schemas.openxmlformats.org/presentationml/2006/main" type="picTx" preserve="1">
+<p:sldLayout xmlns:a="http://schemas.openxmlformats.org/drawingml/2006/main" xmlns:r="http://schemas.openxmlformats.org/officeDocument/2006/relationships" xmlns:p="http://schemas.openxmlformats.org/presentationml/2006/main" type="picTx">
   <p:cSld name="Picture with Caption">
+    <p:bg>
+      <p:bgPr>
+        <a:solidFill>
+          <a:srgbClr val="F4F9FD"/>
+        </a:solidFill>
+        <a:effectLst/>
+      </p:bgPr>
+    </p:bg>
     <p:spTree>
       <p:nvGrpSpPr>
         <p:cNvPr id="1" name=""/>
@@ -2749,9 +2837,12 @@
 <p:sldMaster xmlns:a="http://schemas.openxmlformats.org/drawingml/2006/main" xmlns:r="http://schemas.openxmlformats.org/officeDocument/2006/relationships" xmlns:p="http://schemas.openxmlformats.org/presentationml/2006/main">
   <p:cSld>
     <p:bg>
-      <p:bgRef idx="1001">
-        <a:schemeClr val="bg1"/>
-      </p:bgRef>
+      <p:bgPr>
+        <a:solidFill>
+          <a:srgbClr val="F4F9FD"/>
+        </a:solidFill>
+        <a:effectLst/>
+      </p:bgPr>
     </p:bg>
     <p:spTree>
       <p:nvGrpSpPr>
@@ -3009,6 +3100,35 @@
           </a:p>
         </p:txBody>
       </p:sp>
+      <p:sp>
+        <p:nvSpPr>
+          <p:cNvPr id="9001" name="AccentBar"/>
+          <p:cNvSpPr/>
+          <p:nvPr userDrawn="1"/>
+        </p:nvSpPr>
+        <p:spPr>
+          <a:xfrm>
+            <a:off x="0" y="0"/>
+            <a:ext cx="76200" cy="6858000"/>
+          </a:xfrm>
+          <a:prstGeom prst="rect">
+            <a:avLst/>
+          </a:prstGeom>
+          <a:solidFill>
+            <a:srgbClr val="2E86C1"/>
+          </a:solidFill>
+          <a:ln>
+            <a:noFill/>
+          </a:ln>
+        </p:spPr>
+        <p:txBody>
+          <a:bodyPr/>
+          <a:lstStyle/>
+          <a:p>
+            <a:endParaRPr lang="en-US"/>
+          </a:p>
+        </p:txBody>
+      </p:sp>
     </p:spTree>
     <p:extLst>
       <p:ext uri="{BB962C8B-B14F-4D97-AF65-F5344CB8AC3E}">
@@ -3018,17 +3138,17 @@
   </p:cSld>
   <p:clrMap bg1="lt1" tx1="dk1" bg2="lt2" tx2="dk2" accent1="accent1" accent2="accent2" accent3="accent3" accent4="accent4" accent5="accent5" accent6="accent6" hlink="hlink" folHlink="folHlink"/>
   <p:sldLayoutIdLst>
-    <p:sldLayoutId id="2147483649" r:id="rId1"/>
-    <p:sldLayoutId id="2147483650" r:id="rId2"/>
-    <p:sldLayoutId id="2147483651" r:id="rId3"/>
-    <p:sldLayoutId id="2147483652" r:id="rId4"/>
-    <p:sldLayoutId id="2147483653" r:id="rId5"/>
-    <p:sldLayoutId id="2147483654" r:id="rId6"/>
-    <p:sldLayoutId id="2147483655" r:id="rId7"/>
-    <p:sldLayoutId id="2147483656" r:id="rId8"/>
-    <p:sldLayoutId id="2147483657" r:id="rId9"/>
-    <p:sldLayoutId id="2147483658" r:id="rId10"/>
-    <p:sldLayoutId id="2147483659" r:id="rId11"/>
+    <p:sldLayoutId id="2147483661" r:id="rId1"/>
+    <p:sldLayoutId id="2147483662" r:id="rId2"/>
+    <p:sldLayoutId id="2147483663" r:id="rId3"/>
+    <p:sldLayoutId id="2147483664" r:id="rId4"/>
+    <p:sldLayoutId id="2147483665" r:id="rId5"/>
+    <p:sldLayoutId id="2147483666" r:id="rId6"/>
+    <p:sldLayoutId id="2147483667" r:id="rId7"/>
+    <p:sldLayoutId id="2147483668" r:id="rId8"/>
+    <p:sldLayoutId id="2147483669" r:id="rId9"/>
+    <p:sldLayoutId id="2147483670" r:id="rId10"/>
+    <p:sldLayoutId id="2147483671" r:id="rId11"/>
   </p:sldLayoutIdLst>
   <p:txStyles>
     <p:titleStyle>
@@ -3042,7 +3162,7 @@
         <a:buNone/>
         <a:defRPr sz="4400" kern="1200">
           <a:solidFill>
-            <a:schemeClr val="tx1"/>
+            <a:srgbClr val="1B4F72"/>
           </a:solidFill>
           <a:latin typeface="+mj-lt"/>
           <a:ea typeface="+mj-ea"/>
@@ -3062,7 +3182,7 @@
         <a:buChar char="•"/>
         <a:defRPr sz="2800" kern="1200">
           <a:solidFill>
-            <a:schemeClr val="tx1"/>
+            <a:srgbClr val="0F2A44"/>
           </a:solidFill>
           <a:latin typeface="+mn-lt"/>
           <a:ea typeface="+mn-ea"/>
@@ -3080,7 +3200,7 @@
         <a:buChar char="•"/>
         <a:defRPr sz="2400" kern="1200">
           <a:solidFill>
-            <a:schemeClr val="tx1"/>
+            <a:srgbClr val="0F2A44"/>
           </a:solidFill>
           <a:latin typeface="+mn-lt"/>
           <a:ea typeface="+mn-ea"/>
@@ -3098,7 +3218,7 @@
         <a:buChar char="•"/>
         <a:defRPr sz="2000" kern="1200">
           <a:solidFill>
-            <a:schemeClr val="tx1"/>
+            <a:srgbClr val="0F2A44"/>
           </a:solidFill>
           <a:latin typeface="+mn-lt"/>
           <a:ea typeface="+mn-ea"/>
@@ -3116,7 +3236,7 @@
         <a:buChar char="•"/>
         <a:defRPr sz="1800" kern="1200">
           <a:solidFill>
-            <a:schemeClr val="tx1"/>
+            <a:srgbClr val="0F2A44"/>
           </a:solidFill>
           <a:latin typeface="+mn-lt"/>
           <a:ea typeface="+mn-ea"/>
@@ -3134,7 +3254,7 @@
         <a:buChar char="•"/>
         <a:defRPr sz="1800" kern="1200">
           <a:solidFill>
-            <a:schemeClr val="tx1"/>
+            <a:srgbClr val="0F2A44"/>
           </a:solidFill>
           <a:latin typeface="+mn-lt"/>
           <a:ea typeface="+mn-ea"/>
@@ -3152,7 +3272,7 @@
         <a:buChar char="•"/>
         <a:defRPr sz="1800" kern="1200">
           <a:solidFill>
-            <a:schemeClr val="tx1"/>
+            <a:srgbClr val="0F2A44"/>
           </a:solidFill>
           <a:latin typeface="+mn-lt"/>
           <a:ea typeface="+mn-ea"/>
@@ -3170,7 +3290,7 @@
         <a:buChar char="•"/>
         <a:defRPr sz="1800" kern="1200">
           <a:solidFill>
-            <a:schemeClr val="tx1"/>
+            <a:srgbClr val="0F2A44"/>
           </a:solidFill>
           <a:latin typeface="+mn-lt"/>
           <a:ea typeface="+mn-ea"/>
@@ -3188,7 +3308,7 @@
         <a:buChar char="•"/>
         <a:defRPr sz="1800" kern="1200">
           <a:solidFill>
-            <a:schemeClr val="tx1"/>
+            <a:srgbClr val="0F2A44"/>
           </a:solidFill>
           <a:latin typeface="+mn-lt"/>
           <a:ea typeface="+mn-ea"/>
@@ -3206,7 +3326,7 @@
         <a:buChar char="•"/>
         <a:defRPr sz="1800" kern="1200">
           <a:solidFill>
-            <a:schemeClr val="tx1"/>
+            <a:srgbClr val="0F2A44"/>
           </a:solidFill>
           <a:latin typeface="+mn-lt"/>
           <a:ea typeface="+mn-ea"/>
@@ -3390,7 +3510,7 @@
     </p:spTree>
     <p:extLst>
       <p:ext uri="{BB962C8B-B14F-4D97-AF65-F5344CB8AC3E}">
-        <p14:creationId xmlns:p14="http://schemas.microsoft.com/office/powerpoint/2010/main" val="1592035418"/>
+        <p14:creationId xmlns:p14="http://schemas.microsoft.com/office/powerpoint/2010/main" val="383142201"/>
       </p:ext>
     </p:extLst>
   </p:cSld>
@@ -3417,6 +3537,31 @@
           <a:chExt cx="0" cy="0"/>
         </a:xfrm>
       </p:grpSpPr>
+      <p:sp>
+        <p:nvSpPr>
+          <p:cNvPr id="4" name="Title 3">
+            <a:extLst>
+              <a:ext uri="{FF2B5EF4-FFF2-40B4-BE49-F238E27FC236}">
+                <a16:creationId xmlns:a16="http://schemas.microsoft.com/office/drawing/2014/main" id="{BE2FA9A7-3F93-BC9C-A049-53C30ED26580}"/>
+              </a:ext>
+            </a:extLst>
+          </p:cNvPr>
+          <p:cNvSpPr>
+            <a:spLocks noGrp="1"/>
+          </p:cNvSpPr>
+          <p:nvPr>
+            <p:ph type="title"/>
+          </p:nvPr>
+        </p:nvSpPr>
+        <p:spPr/>
+        <p:txBody>
+          <a:bodyPr/>
+          <a:lstStyle/>
+          <a:p>
+            <a:endParaRPr lang="en-US"/>
+          </a:p>
+        </p:txBody>
+      </p:sp>
       <p:sp>
         <p:nvSpPr>
           <p:cNvPr id="3" name="Content Placeholder 2">
@@ -3633,12 +3778,7 @@
             <p:ph idx="1"/>
           </p:nvPr>
         </p:nvSpPr>
-        <p:spPr>
-          <a:xfrm>
-            <a:off x="838200" y="1830220"/>
-            <a:ext cx="10515600" cy="4351338"/>
-          </a:xfrm>
-        </p:spPr>
+        <p:spPr/>
         <p:txBody>
           <a:bodyPr>
             <a:normAutofit fontScale="92500"/>
@@ -4473,8 +4613,8 @@
         </p:nvSpPr>
         <p:spPr>
           <a:xfrm>
-            <a:off x="9810271" y="4001294"/>
-            <a:ext cx="1337138" cy="2308324"/>
+            <a:off x="8191500" y="4191000"/>
+            <a:ext cx="3302000" cy="2032000"/>
           </a:xfrm>
           <a:prstGeom prst="rect">
             <a:avLst/>
@@ -4661,8 +4801,8 @@
         </p:blipFill>
         <p:spPr>
           <a:xfrm>
-            <a:off x="7099235" y="3783801"/>
-            <a:ext cx="4389733" cy="1848932"/>
+            <a:off x="6703947" y="3062288"/>
+            <a:ext cx="5356478" cy="2256120"/>
           </a:xfrm>
           <a:prstGeom prst="rect">
             <a:avLst/>
@@ -4683,38 +4823,38 @@
 </file>
 
 <file path=ppt/theme/theme1.xml><?xml version="1.0" encoding="utf-8"?>
-<a:theme xmlns:a="http://schemas.openxmlformats.org/drawingml/2006/main" name="Office Theme">
+<a:theme xmlns:a="http://schemas.openxmlformats.org/drawingml/2006/main" name="Office Theme [1778963051606]">
   <a:themeElements>
     <a:clrScheme name="Office">
       <a:dk1>
-        <a:sysClr val="windowText" lastClr="000000"/>
+        <a:srgbClr val="0F2A44"/>
       </a:dk1>
       <a:lt1>
-        <a:sysClr val="window" lastClr="FFFFFF"/>
+        <a:srgbClr val="F4F9FD"/>
       </a:lt1>
       <a:dk2>
-        <a:srgbClr val="44546A"/>
+        <a:srgbClr val="1F4E79"/>
       </a:dk2>
       <a:lt2>
-        <a:srgbClr val="E7E6E6"/>
+        <a:srgbClr val="DCEBF7"/>
       </a:lt2>
       <a:accent1>
-        <a:srgbClr val="4472C4"/>
+        <a:srgbClr val="2E86C1"/>
       </a:accent1>
       <a:accent2>
-        <a:srgbClr val="ED7D31"/>
+        <a:srgbClr val="5DADE2"/>
       </a:accent2>
       <a:accent3>
-        <a:srgbClr val="A5A5A5"/>
+        <a:srgbClr val="85C1E9"/>
       </a:accent3>
       <a:accent4>
-        <a:srgbClr val="FFC000"/>
+        <a:srgbClr val="AED6F1"/>
       </a:accent4>
       <a:accent5>
-        <a:srgbClr val="5B9BD5"/>
+        <a:srgbClr val="1B4F72"/>
       </a:accent5>
       <a:accent6>
-        <a:srgbClr val="70AD47"/>
+        <a:srgbClr val="F39C12"/>
       </a:accent6>
       <a:hlink>
         <a:srgbClr val="0563C1"/>
@@ -4725,7 +4865,7 @@
     </a:clrScheme>
     <a:fontScheme name="Office">
       <a:majorFont>
-        <a:latin typeface="Calibri Light" panose="020F0302020204030204"/>
+        <a:latin typeface="Calibri" panose="020F0302020204030204"/>
         <a:ea typeface=""/>
         <a:cs typeface=""/>
         <a:font script="Jpan" typeface="游ゴシック Light"/>
